--- a/smart-authorization-presentation.pptx
+++ b/smart-authorization-presentation.pptx
@@ -473,7 +473,7 @@
           <a:p>
             <a:fld id="{5943B5BA-8FE1-4769-B5B1-BD8C362CA2D3}" type="datetimeFigureOut">
               <a:rPr lang="en-US" smtClean="0"/>
-              <a:t>1/19/2026</a:t>
+              <a:t>3/1/2026</a:t>
             </a:fld>
             <a:endParaRPr lang="en-US"/>
           </a:p>
@@ -9078,7 +9078,7 @@
           <a:p>
             <a:fld id="{DC509093-0A88-4CE0-881F-99629760210A}" type="datetimeFigureOut">
               <a:rPr lang="en-US" smtClean="0"/>
-              <a:t>1/19/2026</a:t>
+              <a:t>3/1/2026</a:t>
             </a:fld>
             <a:endParaRPr lang="en-US"/>
           </a:p>
@@ -9246,7 +9246,7 @@
           <a:p>
             <a:fld id="{DC509093-0A88-4CE0-881F-99629760210A}" type="datetimeFigureOut">
               <a:rPr lang="en-US" smtClean="0"/>
-              <a:t>1/19/2026</a:t>
+              <a:t>3/1/2026</a:t>
             </a:fld>
             <a:endParaRPr lang="en-US"/>
           </a:p>
@@ -9424,7 +9424,7 @@
           <a:p>
             <a:fld id="{DC509093-0A88-4CE0-881F-99629760210A}" type="datetimeFigureOut">
               <a:rPr lang="en-US" smtClean="0"/>
-              <a:t>1/19/2026</a:t>
+              <a:t>3/1/2026</a:t>
             </a:fld>
             <a:endParaRPr lang="en-US"/>
           </a:p>
@@ -10692,7 +10692,7 @@
           <a:p>
             <a:fld id="{DC509093-0A88-4CE0-881F-99629760210A}" type="datetimeFigureOut">
               <a:rPr lang="en-US" smtClean="0"/>
-              <a:t>1/19/2026</a:t>
+              <a:t>3/1/2026</a:t>
             </a:fld>
             <a:endParaRPr lang="en-US"/>
           </a:p>
@@ -11706,7 +11706,7 @@
           <a:p>
             <a:fld id="{DC509093-0A88-4CE0-881F-99629760210A}" type="datetimeFigureOut">
               <a:rPr lang="en-US" smtClean="0"/>
-              <a:t>1/19/2026</a:t>
+              <a:t>3/1/2026</a:t>
             </a:fld>
             <a:endParaRPr lang="en-US"/>
           </a:p>
@@ -11991,7 +11991,7 @@
           <a:p>
             <a:fld id="{DC509093-0A88-4CE0-881F-99629760210A}" type="datetimeFigureOut">
               <a:rPr lang="en-US" smtClean="0"/>
-              <a:t>1/19/2026</a:t>
+              <a:t>3/1/2026</a:t>
             </a:fld>
             <a:endParaRPr lang="en-US"/>
           </a:p>
@@ -12410,7 +12410,7 @@
           <a:p>
             <a:fld id="{DC509093-0A88-4CE0-881F-99629760210A}" type="datetimeFigureOut">
               <a:rPr lang="en-US" smtClean="0"/>
-              <a:t>1/19/2026</a:t>
+              <a:t>3/1/2026</a:t>
             </a:fld>
             <a:endParaRPr lang="en-US"/>
           </a:p>
@@ -12527,7 +12527,7 @@
           <a:p>
             <a:fld id="{DC509093-0A88-4CE0-881F-99629760210A}" type="datetimeFigureOut">
               <a:rPr lang="en-US" smtClean="0"/>
-              <a:t>1/19/2026</a:t>
+              <a:t>3/1/2026</a:t>
             </a:fld>
             <a:endParaRPr lang="en-US"/>
           </a:p>
@@ -12622,7 +12622,7 @@
           <a:p>
             <a:fld id="{DC509093-0A88-4CE0-881F-99629760210A}" type="datetimeFigureOut">
               <a:rPr lang="en-US" smtClean="0"/>
-              <a:t>1/19/2026</a:t>
+              <a:t>3/1/2026</a:t>
             </a:fld>
             <a:endParaRPr lang="en-US"/>
           </a:p>
@@ -12897,7 +12897,7 @@
           <a:p>
             <a:fld id="{DC509093-0A88-4CE0-881F-99629760210A}" type="datetimeFigureOut">
               <a:rPr lang="en-US" smtClean="0"/>
-              <a:t>1/19/2026</a:t>
+              <a:t>3/1/2026</a:t>
             </a:fld>
             <a:endParaRPr lang="en-US"/>
           </a:p>
@@ -13149,7 +13149,7 @@
           <a:p>
             <a:fld id="{DC509093-0A88-4CE0-881F-99629760210A}" type="datetimeFigureOut">
               <a:rPr lang="en-US" smtClean="0"/>
-              <a:t>1/19/2026</a:t>
+              <a:t>3/1/2026</a:t>
             </a:fld>
             <a:endParaRPr lang="en-US"/>
           </a:p>
@@ -13360,7 +13360,7 @@
           <a:p>
             <a:fld id="{DC509093-0A88-4CE0-881F-99629760210A}" type="datetimeFigureOut">
               <a:rPr lang="en-US" smtClean="0"/>
-              <a:t>1/19/2026</a:t>
+              <a:t>3/1/2026</a:t>
             </a:fld>
             <a:endParaRPr lang="en-US"/>
           </a:p>
@@ -14661,18 +14661,17 @@
           <a:lstStyle/>
           <a:p>
             <a:r>
-              <a:rPr lang="en-US"/>
-              <a:t>22</a:t>
-            </a:r>
-            <a:r>
-              <a:rPr lang="en-US" baseline="30000"/>
+              <a:rPr lang="en-US" dirty="0"/>
+              <a:t>4</a:t>
+            </a:r>
+            <a:r>
+              <a:rPr lang="en-US" baseline="30000" dirty="0"/>
               <a:t>th</a:t>
             </a:r>
             <a:r>
-              <a:rPr lang="en-US"/>
-              <a:t> of January 2026</a:t>
-            </a:r>
-            <a:endParaRPr lang="en-US" dirty="0"/>
+              <a:rPr lang="en-US" dirty="0"/>
+              <a:t> of March 2026</a:t>
+            </a:r>
           </a:p>
         </p:txBody>
       </p:sp>

--- a/smart-authorization-presentation.pptx
+++ b/smart-authorization-presentation.pptx
@@ -473,7 +473,7 @@
           <a:p>
             <a:fld id="{5943B5BA-8FE1-4769-B5B1-BD8C362CA2D3}" type="datetimeFigureOut">
               <a:rPr lang="en-US" smtClean="0"/>
-              <a:t>3/1/2026</a:t>
+              <a:t>4/27/2026</a:t>
             </a:fld>
             <a:endParaRPr lang="en-US"/>
           </a:p>
@@ -9078,7 +9078,7 @@
           <a:p>
             <a:fld id="{DC509093-0A88-4CE0-881F-99629760210A}" type="datetimeFigureOut">
               <a:rPr lang="en-US" smtClean="0"/>
-              <a:t>3/1/2026</a:t>
+              <a:t>4/27/2026</a:t>
             </a:fld>
             <a:endParaRPr lang="en-US"/>
           </a:p>
@@ -9246,7 +9246,7 @@
           <a:p>
             <a:fld id="{DC509093-0A88-4CE0-881F-99629760210A}" type="datetimeFigureOut">
               <a:rPr lang="en-US" smtClean="0"/>
-              <a:t>3/1/2026</a:t>
+              <a:t>4/27/2026</a:t>
             </a:fld>
             <a:endParaRPr lang="en-US"/>
           </a:p>
@@ -9424,7 +9424,7 @@
           <a:p>
             <a:fld id="{DC509093-0A88-4CE0-881F-99629760210A}" type="datetimeFigureOut">
               <a:rPr lang="en-US" smtClean="0"/>
-              <a:t>3/1/2026</a:t>
+              <a:t>4/27/2026</a:t>
             </a:fld>
             <a:endParaRPr lang="en-US"/>
           </a:p>
@@ -10692,7 +10692,7 @@
           <a:p>
             <a:fld id="{DC509093-0A88-4CE0-881F-99629760210A}" type="datetimeFigureOut">
               <a:rPr lang="en-US" smtClean="0"/>
-              <a:t>3/1/2026</a:t>
+              <a:t>4/27/2026</a:t>
             </a:fld>
             <a:endParaRPr lang="en-US"/>
           </a:p>
@@ -11706,7 +11706,7 @@
           <a:p>
             <a:fld id="{DC509093-0A88-4CE0-881F-99629760210A}" type="datetimeFigureOut">
               <a:rPr lang="en-US" smtClean="0"/>
-              <a:t>3/1/2026</a:t>
+              <a:t>4/27/2026</a:t>
             </a:fld>
             <a:endParaRPr lang="en-US"/>
           </a:p>
@@ -11991,7 +11991,7 @@
           <a:p>
             <a:fld id="{DC509093-0A88-4CE0-881F-99629760210A}" type="datetimeFigureOut">
               <a:rPr lang="en-US" smtClean="0"/>
-              <a:t>3/1/2026</a:t>
+              <a:t>4/27/2026</a:t>
             </a:fld>
             <a:endParaRPr lang="en-US"/>
           </a:p>
@@ -12410,7 +12410,7 @@
           <a:p>
             <a:fld id="{DC509093-0A88-4CE0-881F-99629760210A}" type="datetimeFigureOut">
               <a:rPr lang="en-US" smtClean="0"/>
-              <a:t>3/1/2026</a:t>
+              <a:t>4/27/2026</a:t>
             </a:fld>
             <a:endParaRPr lang="en-US"/>
           </a:p>
@@ -12527,7 +12527,7 @@
           <a:p>
             <a:fld id="{DC509093-0A88-4CE0-881F-99629760210A}" type="datetimeFigureOut">
               <a:rPr lang="en-US" smtClean="0"/>
-              <a:t>3/1/2026</a:t>
+              <a:t>4/27/2026</a:t>
             </a:fld>
             <a:endParaRPr lang="en-US"/>
           </a:p>
@@ -12622,7 +12622,7 @@
           <a:p>
             <a:fld id="{DC509093-0A88-4CE0-881F-99629760210A}" type="datetimeFigureOut">
               <a:rPr lang="en-US" smtClean="0"/>
-              <a:t>3/1/2026</a:t>
+              <a:t>4/27/2026</a:t>
             </a:fld>
             <a:endParaRPr lang="en-US"/>
           </a:p>
@@ -12897,7 +12897,7 @@
           <a:p>
             <a:fld id="{DC509093-0A88-4CE0-881F-99629760210A}" type="datetimeFigureOut">
               <a:rPr lang="en-US" smtClean="0"/>
-              <a:t>3/1/2026</a:t>
+              <a:t>4/27/2026</a:t>
             </a:fld>
             <a:endParaRPr lang="en-US"/>
           </a:p>
@@ -13149,7 +13149,7 @@
           <a:p>
             <a:fld id="{DC509093-0A88-4CE0-881F-99629760210A}" type="datetimeFigureOut">
               <a:rPr lang="en-US" smtClean="0"/>
-              <a:t>3/1/2026</a:t>
+              <a:t>4/27/2026</a:t>
             </a:fld>
             <a:endParaRPr lang="en-US"/>
           </a:p>
@@ -13360,7 +13360,7 @@
           <a:p>
             <a:fld id="{DC509093-0A88-4CE0-881F-99629760210A}" type="datetimeFigureOut">
               <a:rPr lang="en-US" smtClean="0"/>
-              <a:t>3/1/2026</a:t>
+              <a:t>4/27/2026</a:t>
             </a:fld>
             <a:endParaRPr lang="en-US"/>
           </a:p>
@@ -14661,17 +14661,18 @@
           <a:lstStyle/>
           <a:p>
             <a:r>
-              <a:rPr lang="en-US" dirty="0"/>
-              <a:t>4</a:t>
-            </a:r>
-            <a:r>
-              <a:rPr lang="en-US" baseline="30000" dirty="0"/>
+              <a:rPr lang="en-US"/>
+              <a:t>April 30</a:t>
+            </a:r>
+            <a:r>
+              <a:rPr lang="en-US" baseline="30000"/>
               <a:t>th</a:t>
             </a:r>
             <a:r>
-              <a:rPr lang="en-US" dirty="0"/>
-              <a:t> of March 2026</a:t>
-            </a:r>
+              <a:rPr lang="en-US"/>
+              <a:t>, 2026</a:t>
+            </a:r>
+            <a:endParaRPr lang="en-US" dirty="0"/>
           </a:p>
         </p:txBody>
       </p:sp>

--- a/smart-authorization-presentation.pptx
+++ b/smart-authorization-presentation.pptx
@@ -473,7 +473,7 @@
           <a:p>
             <a:fld id="{5943B5BA-8FE1-4769-B5B1-BD8C362CA2D3}" type="datetimeFigureOut">
               <a:rPr lang="en-US" smtClean="0"/>
-              <a:t>4/27/2026</a:t>
+              <a:t>8/17/2026</a:t>
             </a:fld>
             <a:endParaRPr lang="en-US"/>
           </a:p>
@@ -9078,7 +9078,7 @@
           <a:p>
             <a:fld id="{DC509093-0A88-4CE0-881F-99629760210A}" type="datetimeFigureOut">
               <a:rPr lang="en-US" smtClean="0"/>
-              <a:t>4/27/2026</a:t>
+              <a:t>8/17/2026</a:t>
             </a:fld>
             <a:endParaRPr lang="en-US"/>
           </a:p>
@@ -9246,7 +9246,7 @@
           <a:p>
             <a:fld id="{DC509093-0A88-4CE0-881F-99629760210A}" type="datetimeFigureOut">
               <a:rPr lang="en-US" smtClean="0"/>
-              <a:t>4/27/2026</a:t>
+              <a:t>8/17/2026</a:t>
             </a:fld>
             <a:endParaRPr lang="en-US"/>
           </a:p>
@@ -9424,7 +9424,7 @@
           <a:p>
             <a:fld id="{DC509093-0A88-4CE0-881F-99629760210A}" type="datetimeFigureOut">
               <a:rPr lang="en-US" smtClean="0"/>
-              <a:t>4/27/2026</a:t>
+              <a:t>8/17/2026</a:t>
             </a:fld>
             <a:endParaRPr lang="en-US"/>
           </a:p>
@@ -10692,7 +10692,7 @@
           <a:p>
             <a:fld id="{DC509093-0A88-4CE0-881F-99629760210A}" type="datetimeFigureOut">
               <a:rPr lang="en-US" smtClean="0"/>
-              <a:t>4/27/2026</a:t>
+              <a:t>8/17/2026</a:t>
             </a:fld>
             <a:endParaRPr lang="en-US"/>
           </a:p>
@@ -11706,7 +11706,7 @@
           <a:p>
             <a:fld id="{DC509093-0A88-4CE0-881F-99629760210A}" type="datetimeFigureOut">
               <a:rPr lang="en-US" smtClean="0"/>
-              <a:t>4/27/2026</a:t>
+              <a:t>8/17/2026</a:t>
             </a:fld>
             <a:endParaRPr lang="en-US"/>
           </a:p>
@@ -11991,7 +11991,7 @@
           <a:p>
             <a:fld id="{DC509093-0A88-4CE0-881F-99629760210A}" type="datetimeFigureOut">
               <a:rPr lang="en-US" smtClean="0"/>
-              <a:t>4/27/2026</a:t>
+              <a:t>8/17/2026</a:t>
             </a:fld>
             <a:endParaRPr lang="en-US"/>
           </a:p>
@@ -12410,7 +12410,7 @@
           <a:p>
             <a:fld id="{DC509093-0A88-4CE0-881F-99629760210A}" type="datetimeFigureOut">
               <a:rPr lang="en-US" smtClean="0"/>
-              <a:t>4/27/2026</a:t>
+              <a:t>8/17/2026</a:t>
             </a:fld>
             <a:endParaRPr lang="en-US"/>
           </a:p>
@@ -12527,7 +12527,7 @@
           <a:p>
             <a:fld id="{DC509093-0A88-4CE0-881F-99629760210A}" type="datetimeFigureOut">
               <a:rPr lang="en-US" smtClean="0"/>
-              <a:t>4/27/2026</a:t>
+              <a:t>8/17/2026</a:t>
             </a:fld>
             <a:endParaRPr lang="en-US"/>
           </a:p>
@@ -12622,7 +12622,7 @@
           <a:p>
             <a:fld id="{DC509093-0A88-4CE0-881F-99629760210A}" type="datetimeFigureOut">
               <a:rPr lang="en-US" smtClean="0"/>
-              <a:t>4/27/2026</a:t>
+              <a:t>8/17/2026</a:t>
             </a:fld>
             <a:endParaRPr lang="en-US"/>
           </a:p>
@@ -12897,7 +12897,7 @@
           <a:p>
             <a:fld id="{DC509093-0A88-4CE0-881F-99629760210A}" type="datetimeFigureOut">
               <a:rPr lang="en-US" smtClean="0"/>
-              <a:t>4/27/2026</a:t>
+              <a:t>8/17/2026</a:t>
             </a:fld>
             <a:endParaRPr lang="en-US"/>
           </a:p>
@@ -13149,7 +13149,7 @@
           <a:p>
             <a:fld id="{DC509093-0A88-4CE0-881F-99629760210A}" type="datetimeFigureOut">
               <a:rPr lang="en-US" smtClean="0"/>
-              <a:t>4/27/2026</a:t>
+              <a:t>8/17/2026</a:t>
             </a:fld>
             <a:endParaRPr lang="en-US"/>
           </a:p>
@@ -13360,7 +13360,7 @@
           <a:p>
             <a:fld id="{DC509093-0A88-4CE0-881F-99629760210A}" type="datetimeFigureOut">
               <a:rPr lang="en-US" smtClean="0"/>
-              <a:t>4/27/2026</a:t>
+              <a:t>8/17/2026</a:t>
             </a:fld>
             <a:endParaRPr lang="en-US"/>
           </a:p>
@@ -14661,18 +14661,17 @@
           <a:lstStyle/>
           <a:p>
             <a:r>
-              <a:rPr lang="en-US"/>
-              <a:t>April 30</a:t>
-            </a:r>
-            <a:r>
-              <a:rPr lang="en-US" baseline="30000"/>
-              <a:t>th</a:t>
-            </a:r>
-            <a:r>
-              <a:rPr lang="en-US"/>
-              <a:t>, 2026</a:t>
-            </a:r>
-            <a:endParaRPr lang="en-US" dirty="0"/>
+              <a:rPr lang="en-US" dirty="0"/>
+              <a:t>20</a:t>
+            </a:r>
+            <a:r>
+              <a:rPr lang="en-US" baseline="30000" dirty="0"/>
+              <a:t>th </a:t>
+            </a:r>
+            <a:r>
+              <a:rPr lang="en-US" dirty="0"/>
+              <a:t>of August 2026</a:t>
+            </a:r>
           </a:p>
         </p:txBody>
       </p:sp>
